--- a/Operating System/Mid Term Slide/Lecture Note 03_CSE 309 (2).pptx
+++ b/Operating System/Mid Term Slide/Lecture Note 03_CSE 309 (2).pptx
@@ -2,62 +2,62 @@
 <file path=ppt/presentation.xml><?xml version="1.0" encoding="utf-8"?>
 <p:presentation xmlns:a="http://schemas.openxmlformats.org/drawingml/2006/main" xmlns:r="http://schemas.openxmlformats.org/officeDocument/2006/relationships" xmlns:p="http://schemas.openxmlformats.org/presentationml/2006/main" strictFirstAndLastChars="0" saveSubsetFonts="1" autoCompressPictures="0">
   <p:sldMasterIdLst>
-    <p:sldMasterId id="2147483664" r:id="rId1"/>
+    <p:sldMasterId id="2147483664" r:id="rId4"/>
   </p:sldMasterIdLst>
   <p:notesMasterIdLst>
-    <p:notesMasterId r:id="rId49"/>
+    <p:notesMasterId r:id="rId52"/>
   </p:notesMasterIdLst>
   <p:handoutMasterIdLst>
-    <p:handoutMasterId r:id="rId50"/>
+    <p:handoutMasterId r:id="rId53"/>
   </p:handoutMasterIdLst>
   <p:sldIdLst>
-    <p:sldId id="330" r:id="rId2"/>
-    <p:sldId id="411" r:id="rId3"/>
-    <p:sldId id="413" r:id="rId4"/>
-    <p:sldId id="468" r:id="rId5"/>
-    <p:sldId id="414" r:id="rId6"/>
-    <p:sldId id="415" r:id="rId7"/>
-    <p:sldId id="416" r:id="rId8"/>
-    <p:sldId id="417" r:id="rId9"/>
-    <p:sldId id="419" r:id="rId10"/>
-    <p:sldId id="421" r:id="rId11"/>
-    <p:sldId id="423" r:id="rId12"/>
-    <p:sldId id="500" r:id="rId13"/>
-    <p:sldId id="501" r:id="rId14"/>
-    <p:sldId id="428" r:id="rId15"/>
-    <p:sldId id="429" r:id="rId16"/>
-    <p:sldId id="431" r:id="rId17"/>
-    <p:sldId id="430" r:id="rId18"/>
-    <p:sldId id="432" r:id="rId19"/>
-    <p:sldId id="434" r:id="rId20"/>
-    <p:sldId id="471" r:id="rId21"/>
-    <p:sldId id="502" r:id="rId22"/>
-    <p:sldId id="435" r:id="rId23"/>
-    <p:sldId id="436" r:id="rId24"/>
-    <p:sldId id="437" r:id="rId25"/>
-    <p:sldId id="516" r:id="rId26"/>
-    <p:sldId id="479" r:id="rId27"/>
-    <p:sldId id="473" r:id="rId28"/>
-    <p:sldId id="476" r:id="rId29"/>
-    <p:sldId id="445" r:id="rId30"/>
-    <p:sldId id="446" r:id="rId31"/>
-    <p:sldId id="447" r:id="rId32"/>
-    <p:sldId id="448" r:id="rId33"/>
-    <p:sldId id="518" r:id="rId34"/>
-    <p:sldId id="451" r:id="rId35"/>
-    <p:sldId id="496" r:id="rId36"/>
-    <p:sldId id="455" r:id="rId37"/>
-    <p:sldId id="510" r:id="rId38"/>
-    <p:sldId id="457" r:id="rId39"/>
-    <p:sldId id="511" r:id="rId40"/>
-    <p:sldId id="512" r:id="rId41"/>
-    <p:sldId id="513" r:id="rId42"/>
-    <p:sldId id="458" r:id="rId43"/>
-    <p:sldId id="459" r:id="rId44"/>
-    <p:sldId id="460" r:id="rId45"/>
-    <p:sldId id="461" r:id="rId46"/>
-    <p:sldId id="514" r:id="rId47"/>
-    <p:sldId id="467" r:id="rId48"/>
+    <p:sldId id="330" r:id="rId5"/>
+    <p:sldId id="411" r:id="rId6"/>
+    <p:sldId id="413" r:id="rId7"/>
+    <p:sldId id="468" r:id="rId8"/>
+    <p:sldId id="414" r:id="rId9"/>
+    <p:sldId id="415" r:id="rId10"/>
+    <p:sldId id="416" r:id="rId11"/>
+    <p:sldId id="417" r:id="rId12"/>
+    <p:sldId id="419" r:id="rId13"/>
+    <p:sldId id="421" r:id="rId14"/>
+    <p:sldId id="423" r:id="rId15"/>
+    <p:sldId id="500" r:id="rId16"/>
+    <p:sldId id="501" r:id="rId17"/>
+    <p:sldId id="428" r:id="rId18"/>
+    <p:sldId id="429" r:id="rId19"/>
+    <p:sldId id="431" r:id="rId20"/>
+    <p:sldId id="430" r:id="rId21"/>
+    <p:sldId id="432" r:id="rId22"/>
+    <p:sldId id="434" r:id="rId23"/>
+    <p:sldId id="471" r:id="rId24"/>
+    <p:sldId id="502" r:id="rId25"/>
+    <p:sldId id="435" r:id="rId26"/>
+    <p:sldId id="436" r:id="rId27"/>
+    <p:sldId id="437" r:id="rId28"/>
+    <p:sldId id="516" r:id="rId29"/>
+    <p:sldId id="479" r:id="rId30"/>
+    <p:sldId id="473" r:id="rId31"/>
+    <p:sldId id="476" r:id="rId32"/>
+    <p:sldId id="445" r:id="rId33"/>
+    <p:sldId id="446" r:id="rId34"/>
+    <p:sldId id="447" r:id="rId35"/>
+    <p:sldId id="448" r:id="rId36"/>
+    <p:sldId id="518" r:id="rId37"/>
+    <p:sldId id="451" r:id="rId38"/>
+    <p:sldId id="496" r:id="rId39"/>
+    <p:sldId id="455" r:id="rId40"/>
+    <p:sldId id="510" r:id="rId41"/>
+    <p:sldId id="457" r:id="rId42"/>
+    <p:sldId id="511" r:id="rId43"/>
+    <p:sldId id="512" r:id="rId44"/>
+    <p:sldId id="513" r:id="rId45"/>
+    <p:sldId id="458" r:id="rId46"/>
+    <p:sldId id="459" r:id="rId47"/>
+    <p:sldId id="460" r:id="rId48"/>
+    <p:sldId id="461" r:id="rId49"/>
+    <p:sldId id="514" r:id="rId50"/>
+    <p:sldId id="467" r:id="rId51"/>
   </p:sldIdLst>
   <p:sldSz cx="9144000" cy="6858000" type="screen4x3"/>
   <p:notesSz cx="7010400" cy="9296400"/>
@@ -11318,7 +11318,7 @@
             <a:pPr lvl="1"/>
             <a:r>
               <a:rPr lang="en-US" altLang="en-US" dirty="0"/>
-              <a:t>Child duplicate of parent</a:t>
+              <a:t>Child is a duplicate of parent</a:t>
             </a:r>
           </a:p>
           <a:p>
@@ -20571,13 +20571,34 @@
 </file>
 
 <file path=customXml/itemProps1.xml><?xml version="1.0" encoding="utf-8"?>
-<ds:datastoreItem xmlns:ds="http://schemas.openxmlformats.org/officeDocument/2006/customXml" ds:itemID="{8182D823-A77C-4E12-AD80-E80436B1EEFF}"/>
+<ds:datastoreItem xmlns:ds="http://schemas.openxmlformats.org/officeDocument/2006/customXml" ds:itemID="{8182D823-A77C-4E12-AD80-E80436B1EEFF}">
+  <ds:schemaRefs>
+    <ds:schemaRef ds:uri="http://schemas.microsoft.com/office/2006/metadata/contentType"/>
+    <ds:schemaRef ds:uri="http://schemas.microsoft.com/office/2006/metadata/properties/metaAttributes"/>
+    <ds:schemaRef ds:uri="http://www.w3.org/2001/XMLSchema"/>
+    <ds:schemaRef ds:uri="http://schemas.microsoft.com/office/2006/metadata/properties"/>
+    <ds:schemaRef ds:uri="http://schemas.openxmlformats.org/package/2006/metadata/core-properties"/>
+    <ds:schemaRef ds:uri="http://purl.org/dc/elements/1.1/"/>
+    <ds:schemaRef ds:uri="http://purl.org/dc/terms/"/>
+    <ds:schemaRef ds:uri="http://schemas.microsoft.com/internal/obd"/>
+    <ds:schemaRef ds:uri="http://schemas.microsoft.com/office/infopath/2007/PartnerControls"/>
+  </ds:schemaRefs>
+</ds:datastoreItem>
 </file>
 
 <file path=customXml/itemProps2.xml><?xml version="1.0" encoding="utf-8"?>
-<ds:datastoreItem xmlns:ds="http://schemas.openxmlformats.org/officeDocument/2006/customXml" ds:itemID="{D3432BAE-2615-4179-B3E6-3880094EED43}"/>
+<ds:datastoreItem xmlns:ds="http://schemas.openxmlformats.org/officeDocument/2006/customXml" ds:itemID="{D3432BAE-2615-4179-B3E6-3880094EED43}">
+  <ds:schemaRefs>
+    <ds:schemaRef ds:uri="http://schemas.microsoft.com/sharepoint/v3/contenttype/forms"/>
+  </ds:schemaRefs>
+</ds:datastoreItem>
 </file>
 
 <file path=customXml/itemProps3.xml><?xml version="1.0" encoding="utf-8"?>
-<ds:datastoreItem xmlns:ds="http://schemas.openxmlformats.org/officeDocument/2006/customXml" ds:itemID="{7D2491B7-3569-4B92-9BF6-7AFF33CE4FD8}"/>
+<ds:datastoreItem xmlns:ds="http://schemas.openxmlformats.org/officeDocument/2006/customXml" ds:itemID="{7D2491B7-3569-4B92-9BF6-7AFF33CE4FD8}">
+  <ds:schemaRefs>
+    <ds:schemaRef ds:uri="http://schemas.microsoft.com/office/2006/metadata/properties"/>
+    <ds:schemaRef ds:uri="http://schemas.microsoft.com/office/infopath/2007/PartnerControls"/>
+  </ds:schemaRefs>
+</ds:datastoreItem>
 </file>